--- a/Presentations/MCP_Servers_for_Biomedical_Research.pptx
+++ b/Presentations/MCP_Servers_for_Biomedical_Research.pptx
@@ -4797,8 +4797,38 @@
         </p:blipFill>
         <p:spPr>
           <a:xfrm>
-            <a:off x="398874" y="3108960"/>
-            <a:ext cx="6700332" cy="3063240"/>
+            <a:off x="7207135" y="3891742"/>
+            <a:ext cx="4838118" cy="2211878"/>
+          </a:xfrm>
+          <a:prstGeom prst="rect">
+            <a:avLst/>
+          </a:prstGeom>
+        </p:spPr>
+      </p:pic>
+      <p:pic>
+        <p:nvPicPr>
+          <p:cNvPr id="5" name="Obrázek 4">
+            <a:extLst>
+              <a:ext uri="{FF2B5EF4-FFF2-40B4-BE49-F238E27FC236}">
+                <a16:creationId xmlns:a16="http://schemas.microsoft.com/office/drawing/2014/main" id="{667F6171-641F-03C9-EAB1-8A25DCC59E30}"/>
+              </a:ext>
+            </a:extLst>
+          </p:cNvPr>
+          <p:cNvPicPr>
+            <a:picLocks noChangeAspect="1"/>
+          </p:cNvPicPr>
+          <p:nvPr/>
+        </p:nvPicPr>
+        <p:blipFill>
+          <a:blip r:embed="rId3"/>
+          <a:stretch>
+            <a:fillRect/>
+          </a:stretch>
+        </p:blipFill>
+        <p:spPr>
+          <a:xfrm>
+            <a:off x="97746" y="3042340"/>
+            <a:ext cx="6943134" cy="2876441"/>
           </a:xfrm>
           <a:prstGeom prst="rect">
             <a:avLst/>
@@ -5106,7 +5136,7 @@
         </p:blipFill>
         <p:spPr>
           <a:xfrm>
-            <a:off x="243325" y="1756185"/>
+            <a:off x="121662" y="1632866"/>
             <a:ext cx="11948675" cy="3345629"/>
           </a:xfrm>
           <a:prstGeom prst="rect">

--- a/Presentations/MCP_Servers_for_Biomedical_Research.pptx
+++ b/Presentations/MCP_Servers_for_Biomedical_Research.pptx
@@ -5,7 +5,7 @@
     <p:sldMasterId id="2147483648" r:id="rId1"/>
   </p:sldMasterIdLst>
   <p:notesMasterIdLst>
-    <p:notesMasterId r:id="rId10"/>
+    <p:notesMasterId r:id="rId11"/>
   </p:notesMasterIdLst>
   <p:sldIdLst>
     <p:sldId id="256" r:id="rId2"/>
@@ -14,8 +14,9 @@
     <p:sldId id="258" r:id="rId5"/>
     <p:sldId id="264" r:id="rId6"/>
     <p:sldId id="265" r:id="rId7"/>
-    <p:sldId id="267" r:id="rId8"/>
-    <p:sldId id="263" r:id="rId9"/>
+    <p:sldId id="269" r:id="rId8"/>
+    <p:sldId id="267" r:id="rId9"/>
+    <p:sldId id="263" r:id="rId10"/>
   </p:sldIdLst>
   <p:sldSz cx="12192000" cy="6858000"/>
   <p:notesSz cx="6858000" cy="12192000"/>
@@ -669,7 +670,7 @@
           <a:p>
             <a:fld id="{F7021451-1387-4CA6-816F-3879F97B5CBC}" type="slidenum">
               <a:rPr lang="en-US"/>
-              <a:t>8</a:t>
+              <a:t>9</a:t>
             </a:fld>
             <a:endParaRPr lang="en-US"/>
           </a:p>
@@ -2421,7 +2422,7 @@
                 <a:ea typeface="Calibri" pitchFamily="34" charset="-122"/>
                 <a:cs typeface="Calibri" pitchFamily="34" charset="-120"/>
               </a:rPr>
-              <a:t>2 / 7</a:t>
+              <a:t>1 / 6</a:t>
             </a:r>
             <a:endParaRPr lang="en-US" sz="1000" dirty="0"/>
           </a:p>
@@ -2834,7 +2835,7 @@
                 <a:ea typeface="Calibri" pitchFamily="34" charset="-122"/>
                 <a:cs typeface="Calibri" pitchFamily="34" charset="-120"/>
               </a:rPr>
-              <a:t>2 / 7</a:t>
+              <a:t>2 / 6</a:t>
             </a:r>
             <a:endParaRPr lang="en-US" sz="1000" dirty="0"/>
           </a:p>
@@ -3608,7 +3609,7 @@
                 <a:ea typeface="Calibri" pitchFamily="34" charset="-122"/>
                 <a:cs typeface="Calibri" pitchFamily="34" charset="-120"/>
               </a:rPr>
-              <a:t>3 / 7</a:t>
+              <a:t>3 / 6</a:t>
             </a:r>
             <a:endParaRPr lang="en-US" sz="1000" dirty="0"/>
           </a:p>
@@ -4770,7 +4771,7 @@
                 </a:solidFill>
                 <a:latin typeface="Calibri"/>
               </a:rPr>
-              <a:t>6 / 7</a:t>
+              <a:t>4 / 6</a:t>
             </a:r>
           </a:p>
         </p:txBody>
@@ -4844,6 +4845,1513 @@
 </file>
 
 <file path=ppt/slides/slide7.xml><?xml version="1.0" encoding="utf-8"?>
+<p:sld xmlns:a="http://schemas.openxmlformats.org/drawingml/2006/main" xmlns:r="http://schemas.openxmlformats.org/officeDocument/2006/relationships" xmlns:p="http://schemas.openxmlformats.org/presentationml/2006/main">
+  <p:cSld>
+    <p:spTree>
+      <p:nvGrpSpPr>
+        <p:cNvPr id="1" name=""/>
+        <p:cNvGrpSpPr/>
+        <p:nvPr/>
+      </p:nvGrpSpPr>
+      <p:grpSpPr>
+        <a:xfrm>
+          <a:off x="0" y="0"/>
+          <a:ext cx="0" cy="0"/>
+          <a:chOff x="0" y="0"/>
+          <a:chExt cx="0" cy="0"/>
+        </a:xfrm>
+      </p:grpSpPr>
+      <p:sp>
+        <p:nvSpPr>
+          <p:cNvPr id="2" name="Rectangle 1"/>
+          <p:cNvSpPr/>
+          <p:nvPr/>
+        </p:nvSpPr>
+        <p:spPr>
+          <a:xfrm>
+            <a:off x="457200" y="274320"/>
+            <a:ext cx="11247120" cy="594360"/>
+          </a:xfrm>
+          <a:prstGeom prst="rect">
+            <a:avLst/>
+          </a:prstGeom>
+          <a:noFill/>
+          <a:ln>
+            <a:noFill/>
+          </a:ln>
+          <a:effectLst/>
+        </p:spPr>
+        <p:style>
+          <a:lnRef idx="1">
+            <a:schemeClr val="accent1"/>
+          </a:lnRef>
+          <a:fillRef idx="3">
+            <a:schemeClr val="accent1"/>
+          </a:fillRef>
+          <a:effectRef idx="2">
+            <a:schemeClr val="accent1"/>
+          </a:effectRef>
+          <a:fontRef idx="minor">
+            <a:schemeClr val="lt1"/>
+          </a:fontRef>
+        </p:style>
+        <p:txBody>
+          <a:bodyPr wrap="square" lIns="109728" tIns="36576" rIns="109728" bIns="36576" rtlCol="0" anchor="ctr"/>
+          <a:lstStyle/>
+          <a:p>
+            <a:r>
+              <a:rPr sz="3000" b="1" dirty="0">
+                <a:solidFill>
+                  <a:srgbClr val="0B1F3A"/>
+                </a:solidFill>
+                <a:latin typeface="Georgia"/>
+              </a:rPr>
+              <a:t>Sensitive </a:t>
+            </a:r>
+            <a:r>
+              <a:rPr lang="cs-CZ" sz="3000" b="1" dirty="0">
+                <a:solidFill>
+                  <a:srgbClr val="0B1F3A"/>
+                </a:solidFill>
+                <a:latin typeface="Georgia"/>
+              </a:rPr>
+              <a:t>MCP </a:t>
+            </a:r>
+            <a:r>
+              <a:rPr sz="3000" b="1" dirty="0">
+                <a:solidFill>
+                  <a:srgbClr val="0B1F3A"/>
+                </a:solidFill>
+                <a:latin typeface="Georgia"/>
+              </a:rPr>
+              <a:t>Chimera</a:t>
+            </a:r>
+          </a:p>
+        </p:txBody>
+      </p:sp>
+      <p:sp>
+        <p:nvSpPr>
+          <p:cNvPr id="3" name="Rectangle 2"/>
+          <p:cNvSpPr/>
+          <p:nvPr/>
+        </p:nvSpPr>
+        <p:spPr>
+          <a:xfrm>
+            <a:off x="457200" y="868680"/>
+            <a:ext cx="11247120" cy="320040"/>
+          </a:xfrm>
+          <a:prstGeom prst="rect">
+            <a:avLst/>
+          </a:prstGeom>
+          <a:noFill/>
+          <a:ln>
+            <a:noFill/>
+          </a:ln>
+          <a:effectLst/>
+        </p:spPr>
+        <p:style>
+          <a:lnRef idx="1">
+            <a:schemeClr val="accent1"/>
+          </a:lnRef>
+          <a:fillRef idx="3">
+            <a:schemeClr val="accent1"/>
+          </a:fillRef>
+          <a:effectRef idx="2">
+            <a:schemeClr val="accent1"/>
+          </a:effectRef>
+          <a:fontRef idx="minor">
+            <a:schemeClr val="lt1"/>
+          </a:fontRef>
+        </p:style>
+        <p:txBody>
+          <a:bodyPr wrap="square" lIns="109728" tIns="36576" rIns="109728" bIns="36576" rtlCol="0" anchor="ctr"/>
+          <a:lstStyle/>
+          <a:p>
+            <a:pPr algn="l"/>
+            <a:r>
+              <a:rPr sz="1400" b="0">
+                <a:solidFill>
+                  <a:srgbClr val="1C7293"/>
+                </a:solidFill>
+                <a:latin typeface="Calibri"/>
+              </a:rPr>
+              <a:t>The lightweight counterpart to MCP Chimera — a bounded slice of compute, nothing more</a:t>
+            </a:r>
+          </a:p>
+        </p:txBody>
+      </p:sp>
+      <p:sp>
+        <p:nvSpPr>
+          <p:cNvPr id="4" name="Rectangle 3"/>
+          <p:cNvSpPr/>
+          <p:nvPr/>
+        </p:nvSpPr>
+        <p:spPr>
+          <a:xfrm>
+            <a:off x="457200" y="1234440"/>
+            <a:ext cx="365760" cy="45720"/>
+          </a:xfrm>
+          <a:prstGeom prst="rect">
+            <a:avLst/>
+          </a:prstGeom>
+          <a:solidFill>
+            <a:srgbClr val="F2A65A"/>
+          </a:solidFill>
+          <a:ln>
+            <a:noFill/>
+          </a:ln>
+          <a:effectLst/>
+        </p:spPr>
+        <p:style>
+          <a:lnRef idx="1">
+            <a:schemeClr val="accent1"/>
+          </a:lnRef>
+          <a:fillRef idx="3">
+            <a:schemeClr val="accent1"/>
+          </a:fillRef>
+          <a:effectRef idx="2">
+            <a:schemeClr val="accent1"/>
+          </a:effectRef>
+          <a:fontRef idx="minor">
+            <a:schemeClr val="lt1"/>
+          </a:fontRef>
+        </p:style>
+        <p:txBody>
+          <a:bodyPr rtlCol="0" anchor="ctr"/>
+          <a:lstStyle/>
+          <a:p>
+            <a:pPr algn="ctr"/>
+            <a:endParaRPr/>
+          </a:p>
+        </p:txBody>
+      </p:sp>
+      <p:sp>
+        <p:nvSpPr>
+          <p:cNvPr id="5" name="Rounded Rectangle 4"/>
+          <p:cNvSpPr/>
+          <p:nvPr/>
+        </p:nvSpPr>
+        <p:spPr>
+          <a:xfrm>
+            <a:off x="457200" y="1463040"/>
+            <a:ext cx="5440680" cy="914400"/>
+          </a:xfrm>
+          <a:prstGeom prst="roundRect">
+            <a:avLst/>
+          </a:prstGeom>
+          <a:solidFill>
+            <a:srgbClr val="1C7293"/>
+          </a:solidFill>
+          <a:ln>
+            <a:noFill/>
+          </a:ln>
+          <a:effectLst/>
+        </p:spPr>
+        <p:style>
+          <a:lnRef idx="1">
+            <a:schemeClr val="accent1"/>
+          </a:lnRef>
+          <a:fillRef idx="3">
+            <a:schemeClr val="accent1"/>
+          </a:fillRef>
+          <a:effectRef idx="2">
+            <a:schemeClr val="accent1"/>
+          </a:effectRef>
+          <a:fontRef idx="minor">
+            <a:schemeClr val="lt1"/>
+          </a:fontRef>
+        </p:style>
+        <p:txBody>
+          <a:bodyPr wrap="square" lIns="201168" tIns="36576" rIns="109728" bIns="36576" rtlCol="0" anchor="ctr"/>
+          <a:lstStyle/>
+          <a:p>
+            <a:pPr algn="l">
+              <a:spcAft>
+                <a:spcPts val="300"/>
+              </a:spcAft>
+            </a:pPr>
+            <a:r>
+              <a:rPr sz="1700" b="1" dirty="0">
+                <a:solidFill>
+                  <a:srgbClr val="FFFFFF"/>
+                </a:solidFill>
+                <a:latin typeface="Georgia"/>
+              </a:rPr>
+              <a:t>MCP Chimera</a:t>
+            </a:r>
+            <a:r>
+              <a:rPr sz="1200" b="0" dirty="0">
+                <a:solidFill>
+                  <a:srgbClr val="E8EEF4"/>
+                </a:solidFill>
+                <a:latin typeface="Calibri"/>
+              </a:rPr>
+              <a:t>   the full server</a:t>
+            </a:r>
+          </a:p>
+          <a:p>
+            <a:pPr algn="l">
+              <a:spcAft>
+                <a:spcPts val="300"/>
+              </a:spcAft>
+            </a:pPr>
+            <a:r>
+              <a:rPr sz="1150" b="0" dirty="0">
+                <a:solidFill>
+                  <a:srgbClr val="E8EEF4"/>
+                </a:solidFill>
+                <a:latin typeface="Calibri"/>
+              </a:rPr>
+              <a:t>Many tools: submit &amp; monitor jobs, fetch results, </a:t>
+            </a:r>
+            <a:r>
+              <a:rPr lang="cs-CZ" sz="1150" dirty="0" err="1">
+                <a:solidFill>
+                  <a:srgbClr val="E8EEF4"/>
+                </a:solidFill>
+                <a:latin typeface="Calibri"/>
+              </a:rPr>
+              <a:t>install</a:t>
+            </a:r>
+            <a:r>
+              <a:rPr lang="cs-CZ" sz="1150" dirty="0">
+                <a:solidFill>
+                  <a:srgbClr val="E8EEF4"/>
+                </a:solidFill>
+                <a:latin typeface="Calibri"/>
+              </a:rPr>
+              <a:t> </a:t>
+            </a:r>
+            <a:r>
+              <a:rPr lang="cs-CZ" sz="1150" dirty="0" err="1">
+                <a:solidFill>
+                  <a:srgbClr val="E8EEF4"/>
+                </a:solidFill>
+                <a:latin typeface="Calibri"/>
+              </a:rPr>
+              <a:t>tools</a:t>
+            </a:r>
+            <a:r>
+              <a:rPr lang="cs-CZ" sz="1150" dirty="0">
+                <a:solidFill>
+                  <a:srgbClr val="E8EEF4"/>
+                </a:solidFill>
+                <a:latin typeface="Calibri"/>
+              </a:rPr>
+              <a:t>…</a:t>
+            </a:r>
+            <a:endParaRPr sz="1150" b="0" dirty="0">
+              <a:solidFill>
+                <a:srgbClr val="E8EEF4"/>
+              </a:solidFill>
+              <a:latin typeface="Calibri"/>
+            </a:endParaRPr>
+          </a:p>
+        </p:txBody>
+      </p:sp>
+      <p:sp>
+        <p:nvSpPr>
+          <p:cNvPr id="6" name="Rounded Rectangle 5"/>
+          <p:cNvSpPr/>
+          <p:nvPr/>
+        </p:nvSpPr>
+        <p:spPr>
+          <a:xfrm>
+            <a:off x="6679154" y="1463040"/>
+            <a:ext cx="5025166" cy="914400"/>
+          </a:xfrm>
+          <a:prstGeom prst="roundRect">
+            <a:avLst/>
+          </a:prstGeom>
+          <a:solidFill>
+            <a:srgbClr val="0B1F3A"/>
+          </a:solidFill>
+          <a:ln>
+            <a:noFill/>
+          </a:ln>
+          <a:effectLst/>
+        </p:spPr>
+        <p:style>
+          <a:lnRef idx="1">
+            <a:schemeClr val="accent1"/>
+          </a:lnRef>
+          <a:fillRef idx="3">
+            <a:schemeClr val="accent1"/>
+          </a:fillRef>
+          <a:effectRef idx="2">
+            <a:schemeClr val="accent1"/>
+          </a:effectRef>
+          <a:fontRef idx="minor">
+            <a:schemeClr val="lt1"/>
+          </a:fontRef>
+        </p:style>
+        <p:txBody>
+          <a:bodyPr wrap="square" lIns="182880" tIns="36576" rIns="109728" bIns="36576" rtlCol="0" anchor="ctr"/>
+          <a:lstStyle/>
+          <a:p>
+            <a:pPr algn="l">
+              <a:spcAft>
+                <a:spcPts val="300"/>
+              </a:spcAft>
+            </a:pPr>
+            <a:r>
+              <a:rPr sz="1500" b="1" dirty="0">
+                <a:solidFill>
+                  <a:srgbClr val="FFFFFF"/>
+                </a:solidFill>
+                <a:latin typeface="Georgia"/>
+              </a:rPr>
+              <a:t>Sensitive Chimera MCP</a:t>
+            </a:r>
+            <a:r>
+              <a:rPr sz="1100" b="0" dirty="0">
+                <a:solidFill>
+                  <a:srgbClr val="F2A65A"/>
+                </a:solidFill>
+                <a:latin typeface="Calibri"/>
+              </a:rPr>
+              <a:t>   this one</a:t>
+            </a:r>
+          </a:p>
+          <a:p>
+            <a:pPr algn="l">
+              <a:spcAft>
+                <a:spcPts val="300"/>
+              </a:spcAft>
+            </a:pPr>
+            <a:r>
+              <a:rPr sz="1150" b="0" dirty="0">
+                <a:solidFill>
+                  <a:srgbClr val="E8EEF4"/>
+                </a:solidFill>
+                <a:latin typeface="Calibri"/>
+              </a:rPr>
+              <a:t>Just a measured amount of compute power, sandboxed in a container.</a:t>
+            </a:r>
+          </a:p>
+        </p:txBody>
+      </p:sp>
+      <p:sp>
+        <p:nvSpPr>
+          <p:cNvPr id="7" name="Chevron 6"/>
+          <p:cNvSpPr/>
+          <p:nvPr/>
+        </p:nvSpPr>
+        <p:spPr>
+          <a:xfrm>
+            <a:off x="6057900" y="1783080"/>
+            <a:ext cx="461234" cy="274320"/>
+          </a:xfrm>
+          <a:prstGeom prst="chevron">
+            <a:avLst/>
+          </a:prstGeom>
+          <a:solidFill>
+            <a:srgbClr val="F2A65A"/>
+          </a:solidFill>
+          <a:ln>
+            <a:noFill/>
+          </a:ln>
+          <a:effectLst/>
+        </p:spPr>
+        <p:style>
+          <a:lnRef idx="1">
+            <a:schemeClr val="accent1"/>
+          </a:lnRef>
+          <a:fillRef idx="3">
+            <a:schemeClr val="accent1"/>
+          </a:fillRef>
+          <a:effectRef idx="2">
+            <a:schemeClr val="accent1"/>
+          </a:effectRef>
+          <a:fontRef idx="minor">
+            <a:schemeClr val="lt1"/>
+          </a:fontRef>
+        </p:style>
+        <p:txBody>
+          <a:bodyPr rtlCol="0" anchor="ctr"/>
+          <a:lstStyle/>
+          <a:p>
+            <a:pPr algn="ctr"/>
+            <a:endParaRPr dirty="0"/>
+          </a:p>
+        </p:txBody>
+      </p:sp>
+      <p:sp>
+        <p:nvSpPr>
+          <p:cNvPr id="8" name="Rounded Rectangle 7"/>
+          <p:cNvSpPr/>
+          <p:nvPr/>
+        </p:nvSpPr>
+        <p:spPr>
+          <a:xfrm>
+            <a:off x="457200" y="2606040"/>
+            <a:ext cx="5486400" cy="3566160"/>
+          </a:xfrm>
+          <a:prstGeom prst="roundRect">
+            <a:avLst/>
+          </a:prstGeom>
+          <a:solidFill>
+            <a:srgbClr val="F4F7FA"/>
+          </a:solidFill>
+          <a:ln w="12700">
+            <a:solidFill>
+              <a:srgbClr val="D5DEE8"/>
+            </a:solidFill>
+          </a:ln>
+          <a:effectLst/>
+        </p:spPr>
+        <p:style>
+          <a:lnRef idx="1">
+            <a:schemeClr val="accent1"/>
+          </a:lnRef>
+          <a:fillRef idx="3">
+            <a:schemeClr val="accent1"/>
+          </a:fillRef>
+          <a:effectRef idx="2">
+            <a:schemeClr val="accent1"/>
+          </a:effectRef>
+          <a:fontRef idx="minor">
+            <a:schemeClr val="lt1"/>
+          </a:fontRef>
+        </p:style>
+        <p:txBody>
+          <a:bodyPr rtlCol="0" anchor="ctr"/>
+          <a:lstStyle/>
+          <a:p>
+            <a:pPr algn="ctr"/>
+            <a:endParaRPr/>
+          </a:p>
+        </p:txBody>
+      </p:sp>
+      <p:sp>
+        <p:nvSpPr>
+          <p:cNvPr id="9" name="Rounded Rectangle 8"/>
+          <p:cNvSpPr/>
+          <p:nvPr/>
+        </p:nvSpPr>
+        <p:spPr>
+          <a:xfrm>
+            <a:off x="457200" y="2606040"/>
+            <a:ext cx="5486400" cy="548640"/>
+          </a:xfrm>
+          <a:prstGeom prst="roundRect">
+            <a:avLst/>
+          </a:prstGeom>
+          <a:solidFill>
+            <a:srgbClr val="B54B3A"/>
+          </a:solidFill>
+          <a:ln>
+            <a:noFill/>
+          </a:ln>
+          <a:effectLst/>
+        </p:spPr>
+        <p:style>
+          <a:lnRef idx="1">
+            <a:schemeClr val="accent1"/>
+          </a:lnRef>
+          <a:fillRef idx="3">
+            <a:schemeClr val="accent1"/>
+          </a:fillRef>
+          <a:effectRef idx="2">
+            <a:schemeClr val="accent1"/>
+          </a:effectRef>
+          <a:fontRef idx="minor">
+            <a:schemeClr val="lt1"/>
+          </a:fontRef>
+        </p:style>
+        <p:txBody>
+          <a:bodyPr rtlCol="0" anchor="ctr"/>
+          <a:lstStyle/>
+          <a:p>
+            <a:pPr algn="ctr"/>
+            <a:endParaRPr/>
+          </a:p>
+        </p:txBody>
+      </p:sp>
+      <p:sp>
+        <p:nvSpPr>
+          <p:cNvPr id="10" name="Rectangle 9"/>
+          <p:cNvSpPr/>
+          <p:nvPr/>
+        </p:nvSpPr>
+        <p:spPr>
+          <a:xfrm>
+            <a:off x="457200" y="2898648"/>
+            <a:ext cx="5486400" cy="256032"/>
+          </a:xfrm>
+          <a:prstGeom prst="rect">
+            <a:avLst/>
+          </a:prstGeom>
+          <a:solidFill>
+            <a:srgbClr val="B54B3A"/>
+          </a:solidFill>
+          <a:ln>
+            <a:noFill/>
+          </a:ln>
+          <a:effectLst/>
+        </p:spPr>
+        <p:style>
+          <a:lnRef idx="1">
+            <a:schemeClr val="accent1"/>
+          </a:lnRef>
+          <a:fillRef idx="3">
+            <a:schemeClr val="accent1"/>
+          </a:fillRef>
+          <a:effectRef idx="2">
+            <a:schemeClr val="accent1"/>
+          </a:effectRef>
+          <a:fontRef idx="minor">
+            <a:schemeClr val="lt1"/>
+          </a:fontRef>
+        </p:style>
+        <p:txBody>
+          <a:bodyPr rtlCol="0" anchor="ctr"/>
+          <a:lstStyle/>
+          <a:p>
+            <a:pPr algn="ctr"/>
+            <a:endParaRPr/>
+          </a:p>
+        </p:txBody>
+      </p:sp>
+      <p:sp>
+        <p:nvSpPr>
+          <p:cNvPr id="11" name="Rectangle 10"/>
+          <p:cNvSpPr/>
+          <p:nvPr/>
+        </p:nvSpPr>
+        <p:spPr>
+          <a:xfrm>
+            <a:off x="457200" y="2606040"/>
+            <a:ext cx="5486400" cy="548640"/>
+          </a:xfrm>
+          <a:prstGeom prst="rect">
+            <a:avLst/>
+          </a:prstGeom>
+          <a:noFill/>
+          <a:ln>
+            <a:noFill/>
+          </a:ln>
+          <a:effectLst/>
+        </p:spPr>
+        <p:style>
+          <a:lnRef idx="1">
+            <a:schemeClr val="accent1"/>
+          </a:lnRef>
+          <a:fillRef idx="3">
+            <a:schemeClr val="accent1"/>
+          </a:fillRef>
+          <a:effectRef idx="2">
+            <a:schemeClr val="accent1"/>
+          </a:effectRef>
+          <a:fontRef idx="minor">
+            <a:schemeClr val="lt1"/>
+          </a:fontRef>
+        </p:style>
+        <p:txBody>
+          <a:bodyPr wrap="square" lIns="228600" tIns="36576" rIns="109728" bIns="36576" rtlCol="0" anchor="ctr"/>
+          <a:lstStyle/>
+          <a:p>
+            <a:pPr algn="l"/>
+            <a:r>
+              <a:rPr sz="1550" b="1">
+                <a:solidFill>
+                  <a:srgbClr val="FFFFFF"/>
+                </a:solidFill>
+                <a:latin typeface="Georgia"/>
+              </a:rPr>
+              <a:t>Restrictions — by design</a:t>
+            </a:r>
+          </a:p>
+        </p:txBody>
+      </p:sp>
+      <p:sp>
+        <p:nvSpPr>
+          <p:cNvPr id="12" name="Rectangle 11"/>
+          <p:cNvSpPr/>
+          <p:nvPr/>
+        </p:nvSpPr>
+        <p:spPr>
+          <a:xfrm>
+            <a:off x="502920" y="3273552"/>
+            <a:ext cx="5394960" cy="2788920"/>
+          </a:xfrm>
+          <a:prstGeom prst="rect">
+            <a:avLst/>
+          </a:prstGeom>
+          <a:noFill/>
+          <a:ln>
+            <a:noFill/>
+          </a:ln>
+          <a:effectLst/>
+        </p:spPr>
+        <p:style>
+          <a:lnRef idx="1">
+            <a:schemeClr val="accent1"/>
+          </a:lnRef>
+          <a:fillRef idx="3">
+            <a:schemeClr val="accent1"/>
+          </a:fillRef>
+          <a:effectRef idx="2">
+            <a:schemeClr val="accent1"/>
+          </a:effectRef>
+          <a:fontRef idx="minor">
+            <a:schemeClr val="lt1"/>
+          </a:fontRef>
+        </p:style>
+        <p:txBody>
+          <a:bodyPr wrap="square" lIns="201168" tIns="36576" rIns="164592" bIns="36576" rtlCol="0" anchor="t"/>
+          <a:lstStyle/>
+          <a:p>
+            <a:pPr algn="l">
+              <a:spcAft>
+                <a:spcPts val="700"/>
+              </a:spcAft>
+            </a:pPr>
+            <a:r>
+              <a:rPr sz="1150" b="1" dirty="0">
+                <a:solidFill>
+                  <a:srgbClr val="B54B3A"/>
+                </a:solidFill>
+                <a:latin typeface="Calibri"/>
+              </a:rPr>
+              <a:t>▸  </a:t>
+            </a:r>
+            <a:r>
+              <a:rPr sz="1150" b="1" dirty="0">
+                <a:solidFill>
+                  <a:srgbClr val="0B1F3A"/>
+                </a:solidFill>
+                <a:latin typeface="Calibri"/>
+              </a:rPr>
+              <a:t>No job control: </a:t>
+            </a:r>
+            <a:r>
+              <a:rPr sz="1150" b="0" dirty="0">
+                <a:solidFill>
+                  <a:srgbClr val="2A3340"/>
+                </a:solidFill>
+                <a:latin typeface="Calibri"/>
+              </a:rPr>
+              <a:t>it can't submit, schedule, or cancel SLURM jobs. A human allocates the box up front with </a:t>
+            </a:r>
+            <a:r>
+              <a:rPr sz="1150" b="0" dirty="0" err="1">
+                <a:solidFill>
+                  <a:srgbClr val="2A3340"/>
+                </a:solidFill>
+                <a:latin typeface="Calibri"/>
+              </a:rPr>
+              <a:t>submit.sh</a:t>
+            </a:r>
+            <a:r>
+              <a:rPr sz="1150" b="0" dirty="0">
+                <a:solidFill>
+                  <a:srgbClr val="2A3340"/>
+                </a:solidFill>
+                <a:latin typeface="Calibri"/>
+              </a:rPr>
+              <a:t>; the agent only attaches into it.</a:t>
+            </a:r>
+          </a:p>
+          <a:p>
+            <a:pPr algn="l">
+              <a:spcAft>
+                <a:spcPts val="700"/>
+              </a:spcAft>
+            </a:pPr>
+            <a:r>
+              <a:rPr sz="1150" b="1" dirty="0">
+                <a:solidFill>
+                  <a:srgbClr val="B54B3A"/>
+                </a:solidFill>
+                <a:latin typeface="Calibri"/>
+              </a:rPr>
+              <a:t>▸  </a:t>
+            </a:r>
+            <a:r>
+              <a:rPr sz="1150" b="1" dirty="0">
+                <a:solidFill>
+                  <a:srgbClr val="0B1F3A"/>
+                </a:solidFill>
+                <a:latin typeface="Calibri"/>
+              </a:rPr>
+              <a:t>Fixed compute envelope: </a:t>
+            </a:r>
+            <a:r>
+              <a:rPr sz="1150" b="0" dirty="0">
+                <a:solidFill>
+                  <a:srgbClr val="2A3340"/>
+                </a:solidFill>
+                <a:latin typeface="Calibri"/>
+              </a:rPr>
+              <a:t>it works within the GPU / CPU / RAM / </a:t>
+            </a:r>
+            <a:r>
+              <a:rPr sz="1150" b="0" dirty="0" err="1">
+                <a:solidFill>
+                  <a:srgbClr val="2A3340"/>
+                </a:solidFill>
+                <a:latin typeface="Calibri"/>
+              </a:rPr>
+              <a:t>walltime</a:t>
+            </a:r>
+            <a:r>
+              <a:rPr sz="1150" b="0" dirty="0">
+                <a:solidFill>
+                  <a:srgbClr val="2A3340"/>
+                </a:solidFill>
+                <a:latin typeface="Calibri"/>
+              </a:rPr>
+              <a:t> the allocation reserved — it cannot ask for more.</a:t>
+            </a:r>
+          </a:p>
+          <a:p>
+            <a:pPr algn="l">
+              <a:spcAft>
+                <a:spcPts val="700"/>
+              </a:spcAft>
+            </a:pPr>
+            <a:r>
+              <a:rPr sz="1150" b="1" dirty="0">
+                <a:solidFill>
+                  <a:srgbClr val="B54B3A"/>
+                </a:solidFill>
+                <a:latin typeface="Calibri"/>
+              </a:rPr>
+              <a:t>▸  </a:t>
+            </a:r>
+            <a:r>
+              <a:rPr sz="1150" b="1" dirty="0">
+                <a:solidFill>
+                  <a:srgbClr val="0B1F3A"/>
+                </a:solidFill>
+                <a:latin typeface="Calibri"/>
+              </a:rPr>
+              <a:t>Four primitives only: </a:t>
+            </a:r>
+            <a:r>
+              <a:rPr sz="1150" b="0" dirty="0">
+                <a:solidFill>
+                  <a:srgbClr val="2A3340"/>
+                </a:solidFill>
+                <a:latin typeface="Calibri"/>
+              </a:rPr>
+              <a:t>bash, </a:t>
+            </a:r>
+            <a:r>
+              <a:rPr sz="1150" b="0" dirty="0" err="1">
+                <a:solidFill>
+                  <a:srgbClr val="2A3340"/>
+                </a:solidFill>
+                <a:latin typeface="Calibri"/>
+              </a:rPr>
+              <a:t>read_file</a:t>
+            </a:r>
+            <a:r>
+              <a:rPr sz="1150" b="0" dirty="0">
+                <a:solidFill>
+                  <a:srgbClr val="2A3340"/>
+                </a:solidFill>
+                <a:latin typeface="Calibri"/>
+              </a:rPr>
+              <a:t>, </a:t>
+            </a:r>
+            <a:r>
+              <a:rPr sz="1150" b="0" dirty="0" err="1">
+                <a:solidFill>
+                  <a:srgbClr val="2A3340"/>
+                </a:solidFill>
+                <a:latin typeface="Calibri"/>
+              </a:rPr>
+              <a:t>write_file</a:t>
+            </a:r>
+            <a:r>
+              <a:rPr sz="1150" b="0" dirty="0">
+                <a:solidFill>
+                  <a:srgbClr val="2A3340"/>
+                </a:solidFill>
+                <a:latin typeface="Calibri"/>
+              </a:rPr>
+              <a:t>, </a:t>
+            </a:r>
+            <a:r>
+              <a:rPr sz="1150" b="0" dirty="0" err="1">
+                <a:solidFill>
+                  <a:srgbClr val="2A3340"/>
+                </a:solidFill>
+                <a:latin typeface="Calibri"/>
+              </a:rPr>
+              <a:t>list_dir</a:t>
+            </a:r>
+            <a:r>
+              <a:rPr sz="1150" b="0" dirty="0">
+                <a:solidFill>
+                  <a:srgbClr val="2A3340"/>
+                </a:solidFill>
+                <a:latin typeface="Calibri"/>
+              </a:rPr>
+              <a:t>. No pipeline orchestration, status, or results tooling.</a:t>
+            </a:r>
+          </a:p>
+          <a:p>
+            <a:pPr algn="l">
+              <a:spcAft>
+                <a:spcPts val="700"/>
+              </a:spcAft>
+            </a:pPr>
+            <a:r>
+              <a:rPr sz="1150" b="1" dirty="0">
+                <a:solidFill>
+                  <a:srgbClr val="B54B3A"/>
+                </a:solidFill>
+                <a:latin typeface="Calibri"/>
+              </a:rPr>
+              <a:t>▸  </a:t>
+            </a:r>
+            <a:r>
+              <a:rPr sz="1150" b="1" dirty="0">
+                <a:solidFill>
+                  <a:srgbClr val="0B1F3A"/>
+                </a:solidFill>
+                <a:latin typeface="Calibri"/>
+              </a:rPr>
+              <a:t>Filesystem-scoped: </a:t>
+            </a:r>
+            <a:r>
+              <a:rPr sz="1150" b="0" dirty="0">
+                <a:solidFill>
+                  <a:srgbClr val="2A3340"/>
+                </a:solidFill>
+                <a:latin typeface="Calibri"/>
+              </a:rPr>
+              <a:t>sees only /workspace — the folder you mount. Everything else is invisible and ephemeral.</a:t>
+            </a:r>
+          </a:p>
+          <a:p>
+            <a:pPr algn="l">
+              <a:spcAft>
+                <a:spcPts val="700"/>
+              </a:spcAft>
+            </a:pPr>
+            <a:r>
+              <a:rPr sz="1150" b="1" dirty="0">
+                <a:solidFill>
+                  <a:srgbClr val="B54B3A"/>
+                </a:solidFill>
+                <a:latin typeface="Calibri"/>
+              </a:rPr>
+              <a:t>▸  </a:t>
+            </a:r>
+            <a:r>
+              <a:rPr sz="1150" b="1" dirty="0">
+                <a:solidFill>
+                  <a:srgbClr val="0B1F3A"/>
+                </a:solidFill>
+                <a:latin typeface="Calibri"/>
+              </a:rPr>
+              <a:t>Time-boxed: </a:t>
+            </a:r>
+            <a:r>
+              <a:rPr sz="1150" b="0" dirty="0">
+                <a:solidFill>
+                  <a:srgbClr val="2A3340"/>
+                </a:solidFill>
+                <a:latin typeface="Calibri"/>
+              </a:rPr>
+              <a:t>the sandbox disappears at </a:t>
+            </a:r>
+            <a:r>
+              <a:rPr sz="1150" b="0" dirty="0" err="1">
+                <a:solidFill>
+                  <a:srgbClr val="2A3340"/>
+                </a:solidFill>
+                <a:latin typeface="Calibri"/>
+              </a:rPr>
+              <a:t>walltime</a:t>
+            </a:r>
+            <a:r>
+              <a:rPr sz="1150" b="0" dirty="0">
+                <a:solidFill>
+                  <a:srgbClr val="2A3340"/>
+                </a:solidFill>
+                <a:latin typeface="Calibri"/>
+              </a:rPr>
+              <a:t> or </a:t>
+            </a:r>
+            <a:r>
+              <a:rPr sz="1150" b="0" dirty="0" err="1">
+                <a:solidFill>
+                  <a:srgbClr val="2A3340"/>
+                </a:solidFill>
+                <a:latin typeface="Calibri"/>
+              </a:rPr>
+              <a:t>scancel</a:t>
+            </a:r>
+            <a:r>
+              <a:rPr sz="1150" b="0" dirty="0">
+                <a:solidFill>
+                  <a:srgbClr val="2A3340"/>
+                </a:solidFill>
+                <a:latin typeface="Calibri"/>
+              </a:rPr>
+              <a:t>.</a:t>
+            </a:r>
+          </a:p>
+        </p:txBody>
+      </p:sp>
+      <p:sp>
+        <p:nvSpPr>
+          <p:cNvPr id="13" name="Rounded Rectangle 12"/>
+          <p:cNvSpPr/>
+          <p:nvPr/>
+        </p:nvSpPr>
+        <p:spPr>
+          <a:xfrm>
+            <a:off x="6245352" y="2606040"/>
+            <a:ext cx="5486400" cy="3566160"/>
+          </a:xfrm>
+          <a:prstGeom prst="roundRect">
+            <a:avLst/>
+          </a:prstGeom>
+          <a:solidFill>
+            <a:srgbClr val="F4F7FA"/>
+          </a:solidFill>
+          <a:ln w="12700">
+            <a:solidFill>
+              <a:srgbClr val="D5DEE8"/>
+            </a:solidFill>
+          </a:ln>
+          <a:effectLst/>
+        </p:spPr>
+        <p:style>
+          <a:lnRef idx="1">
+            <a:schemeClr val="accent1"/>
+          </a:lnRef>
+          <a:fillRef idx="3">
+            <a:schemeClr val="accent1"/>
+          </a:fillRef>
+          <a:effectRef idx="2">
+            <a:schemeClr val="accent1"/>
+          </a:effectRef>
+          <a:fontRef idx="minor">
+            <a:schemeClr val="lt1"/>
+          </a:fontRef>
+        </p:style>
+        <p:txBody>
+          <a:bodyPr rtlCol="0" anchor="ctr"/>
+          <a:lstStyle/>
+          <a:p>
+            <a:pPr algn="ctr"/>
+            <a:endParaRPr/>
+          </a:p>
+        </p:txBody>
+      </p:sp>
+      <p:sp>
+        <p:nvSpPr>
+          <p:cNvPr id="14" name="Rounded Rectangle 13"/>
+          <p:cNvSpPr/>
+          <p:nvPr/>
+        </p:nvSpPr>
+        <p:spPr>
+          <a:xfrm>
+            <a:off x="6245352" y="2606040"/>
+            <a:ext cx="5486400" cy="548640"/>
+          </a:xfrm>
+          <a:prstGeom prst="roundRect">
+            <a:avLst/>
+          </a:prstGeom>
+          <a:solidFill>
+            <a:srgbClr val="2E7D5B"/>
+          </a:solidFill>
+          <a:ln>
+            <a:noFill/>
+          </a:ln>
+          <a:effectLst/>
+        </p:spPr>
+        <p:style>
+          <a:lnRef idx="1">
+            <a:schemeClr val="accent1"/>
+          </a:lnRef>
+          <a:fillRef idx="3">
+            <a:schemeClr val="accent1"/>
+          </a:fillRef>
+          <a:effectRef idx="2">
+            <a:schemeClr val="accent1"/>
+          </a:effectRef>
+          <a:fontRef idx="minor">
+            <a:schemeClr val="lt1"/>
+          </a:fontRef>
+        </p:style>
+        <p:txBody>
+          <a:bodyPr rtlCol="0" anchor="ctr"/>
+          <a:lstStyle/>
+          <a:p>
+            <a:pPr algn="ctr"/>
+            <a:endParaRPr/>
+          </a:p>
+        </p:txBody>
+      </p:sp>
+      <p:sp>
+        <p:nvSpPr>
+          <p:cNvPr id="15" name="Rectangle 14"/>
+          <p:cNvSpPr/>
+          <p:nvPr/>
+        </p:nvSpPr>
+        <p:spPr>
+          <a:xfrm>
+            <a:off x="6245352" y="2898648"/>
+            <a:ext cx="5486400" cy="256032"/>
+          </a:xfrm>
+          <a:prstGeom prst="rect">
+            <a:avLst/>
+          </a:prstGeom>
+          <a:solidFill>
+            <a:srgbClr val="2E7D5B"/>
+          </a:solidFill>
+          <a:ln>
+            <a:noFill/>
+          </a:ln>
+          <a:effectLst/>
+        </p:spPr>
+        <p:style>
+          <a:lnRef idx="1">
+            <a:schemeClr val="accent1"/>
+          </a:lnRef>
+          <a:fillRef idx="3">
+            <a:schemeClr val="accent1"/>
+          </a:fillRef>
+          <a:effectRef idx="2">
+            <a:schemeClr val="accent1"/>
+          </a:effectRef>
+          <a:fontRef idx="minor">
+            <a:schemeClr val="lt1"/>
+          </a:fontRef>
+        </p:style>
+        <p:txBody>
+          <a:bodyPr rtlCol="0" anchor="ctr"/>
+          <a:lstStyle/>
+          <a:p>
+            <a:pPr algn="ctr"/>
+            <a:endParaRPr/>
+          </a:p>
+        </p:txBody>
+      </p:sp>
+      <p:sp>
+        <p:nvSpPr>
+          <p:cNvPr id="16" name="Rectangle 15"/>
+          <p:cNvSpPr/>
+          <p:nvPr/>
+        </p:nvSpPr>
+        <p:spPr>
+          <a:xfrm>
+            <a:off x="6245352" y="2606040"/>
+            <a:ext cx="5486400" cy="548640"/>
+          </a:xfrm>
+          <a:prstGeom prst="rect">
+            <a:avLst/>
+          </a:prstGeom>
+          <a:noFill/>
+          <a:ln>
+            <a:noFill/>
+          </a:ln>
+          <a:effectLst/>
+        </p:spPr>
+        <p:style>
+          <a:lnRef idx="1">
+            <a:schemeClr val="accent1"/>
+          </a:lnRef>
+          <a:fillRef idx="3">
+            <a:schemeClr val="accent1"/>
+          </a:fillRef>
+          <a:effectRef idx="2">
+            <a:schemeClr val="accent1"/>
+          </a:effectRef>
+          <a:fontRef idx="minor">
+            <a:schemeClr val="lt1"/>
+          </a:fontRef>
+        </p:style>
+        <p:txBody>
+          <a:bodyPr wrap="square" lIns="228600" tIns="36576" rIns="109728" bIns="36576" rtlCol="0" anchor="ctr"/>
+          <a:lstStyle/>
+          <a:p>
+            <a:pPr algn="l"/>
+            <a:r>
+              <a:rPr sz="1550" b="1">
+                <a:solidFill>
+                  <a:srgbClr val="FFFFFF"/>
+                </a:solidFill>
+                <a:latin typeface="Georgia"/>
+              </a:rPr>
+              <a:t>What it gives the model</a:t>
+            </a:r>
+          </a:p>
+        </p:txBody>
+      </p:sp>
+      <p:sp>
+        <p:nvSpPr>
+          <p:cNvPr id="17" name="Rectangle 16"/>
+          <p:cNvSpPr/>
+          <p:nvPr/>
+        </p:nvSpPr>
+        <p:spPr>
+          <a:xfrm>
+            <a:off x="6291072" y="3273552"/>
+            <a:ext cx="5394960" cy="2788920"/>
+          </a:xfrm>
+          <a:prstGeom prst="rect">
+            <a:avLst/>
+          </a:prstGeom>
+          <a:noFill/>
+          <a:ln>
+            <a:noFill/>
+          </a:ln>
+          <a:effectLst/>
+        </p:spPr>
+        <p:style>
+          <a:lnRef idx="1">
+            <a:schemeClr val="accent1"/>
+          </a:lnRef>
+          <a:fillRef idx="3">
+            <a:schemeClr val="accent1"/>
+          </a:fillRef>
+          <a:effectRef idx="2">
+            <a:schemeClr val="accent1"/>
+          </a:effectRef>
+          <a:fontRef idx="minor">
+            <a:schemeClr val="lt1"/>
+          </a:fontRef>
+        </p:style>
+        <p:txBody>
+          <a:bodyPr wrap="square" lIns="201168" tIns="36576" rIns="164592" bIns="36576" rtlCol="0" anchor="t"/>
+          <a:lstStyle/>
+          <a:p>
+            <a:pPr algn="l">
+              <a:spcAft>
+                <a:spcPts val="700"/>
+              </a:spcAft>
+            </a:pPr>
+            <a:r>
+              <a:rPr sz="1150" b="1">
+                <a:solidFill>
+                  <a:srgbClr val="2E7D5B"/>
+                </a:solidFill>
+                <a:latin typeface="Calibri"/>
+              </a:rPr>
+              <a:t>▸  </a:t>
+            </a:r>
+            <a:r>
+              <a:rPr sz="1150" b="1">
+                <a:solidFill>
+                  <a:srgbClr val="0B1F3A"/>
+                </a:solidFill>
+                <a:latin typeface="Calibri"/>
+              </a:rPr>
+              <a:t>Real compute: </a:t>
+            </a:r>
+            <a:r>
+              <a:rPr sz="1150" b="0">
+                <a:solidFill>
+                  <a:srgbClr val="2A3340"/>
+                </a:solidFill>
+                <a:latin typeface="Calibri"/>
+              </a:rPr>
+              <a:t>an NVIDIA GPU (CUDA 12.4, --nv), multi-core CPU, and the RAM the job reserved.</a:t>
+            </a:r>
+          </a:p>
+          <a:p>
+            <a:pPr algn="l">
+              <a:spcAft>
+                <a:spcPts val="700"/>
+              </a:spcAft>
+            </a:pPr>
+            <a:r>
+              <a:rPr sz="1150" b="1">
+                <a:solidFill>
+                  <a:srgbClr val="2E7D5B"/>
+                </a:solidFill>
+                <a:latin typeface="Calibri"/>
+              </a:rPr>
+              <a:t>▸  </a:t>
+            </a:r>
+            <a:r>
+              <a:rPr sz="1150" b="1">
+                <a:solidFill>
+                  <a:srgbClr val="0B1F3A"/>
+                </a:solidFill>
+                <a:latin typeface="Calibri"/>
+              </a:rPr>
+              <a:t>Full toolchain: </a:t>
+            </a:r>
+            <a:r>
+              <a:rPr sz="1150" b="0">
+                <a:solidFill>
+                  <a:srgbClr val="2A3340"/>
+                </a:solidFill>
+                <a:latin typeface="Calibri"/>
+              </a:rPr>
+              <a:t>conda / mamba, Python 3.12, R, git, build-essential.</a:t>
+            </a:r>
+          </a:p>
+          <a:p>
+            <a:pPr algn="l">
+              <a:spcAft>
+                <a:spcPts val="700"/>
+              </a:spcAft>
+            </a:pPr>
+            <a:r>
+              <a:rPr sz="1150" b="1">
+                <a:solidFill>
+                  <a:srgbClr val="2E7D5B"/>
+                </a:solidFill>
+                <a:latin typeface="Calibri"/>
+              </a:rPr>
+              <a:t>▸  </a:t>
+            </a:r>
+            <a:r>
+              <a:rPr sz="1150" b="1">
+                <a:solidFill>
+                  <a:srgbClr val="0B1F3A"/>
+                </a:solidFill>
+                <a:latin typeface="Calibri"/>
+              </a:rPr>
+              <a:t>A persistent shell: </a:t>
+            </a:r>
+            <a:r>
+              <a:rPr sz="1150" b="0">
+                <a:solidFill>
+                  <a:srgbClr val="2A3340"/>
+                </a:solidFill>
+                <a:latin typeface="Calibri"/>
+              </a:rPr>
+              <a:t>background jobs and installed packages survive opencode reconnects until the job ends.</a:t>
+            </a:r>
+          </a:p>
+          <a:p>
+            <a:pPr algn="l">
+              <a:spcAft>
+                <a:spcPts val="700"/>
+              </a:spcAft>
+            </a:pPr>
+            <a:r>
+              <a:rPr sz="1150" b="1">
+                <a:solidFill>
+                  <a:srgbClr val="2E7D5B"/>
+                </a:solidFill>
+                <a:latin typeface="Calibri"/>
+              </a:rPr>
+              <a:t>▸  </a:t>
+            </a:r>
+            <a:r>
+              <a:rPr sz="1150" b="1">
+                <a:solidFill>
+                  <a:srgbClr val="0B1F3A"/>
+                </a:solidFill>
+                <a:latin typeface="Calibri"/>
+              </a:rPr>
+              <a:t>Scoped read/write: </a:t>
+            </a:r>
+            <a:r>
+              <a:rPr sz="1150" b="0">
+                <a:solidFill>
+                  <a:srgbClr val="2A3340"/>
+                </a:solidFill>
+                <a:latin typeface="Calibri"/>
+              </a:rPr>
+              <a:t>work freely inside /workspace, your real project folder on the cluster.</a:t>
+            </a:r>
+          </a:p>
+          <a:p>
+            <a:pPr algn="l">
+              <a:spcAft>
+                <a:spcPts val="700"/>
+              </a:spcAft>
+            </a:pPr>
+            <a:r>
+              <a:rPr sz="1150" b="1">
+                <a:solidFill>
+                  <a:srgbClr val="2E7D5B"/>
+                </a:solidFill>
+                <a:latin typeface="Calibri"/>
+              </a:rPr>
+              <a:t>▸  </a:t>
+            </a:r>
+            <a:r>
+              <a:rPr sz="1150" b="1">
+                <a:solidFill>
+                  <a:srgbClr val="0B1F3A"/>
+                </a:solidFill>
+                <a:latin typeface="Calibri"/>
+              </a:rPr>
+              <a:t>Built for Chimera: </a:t>
+            </a:r>
+            <a:r>
+              <a:rPr sz="1150" b="0">
+                <a:solidFill>
+                  <a:srgbClr val="2A3340"/>
+                </a:solidFill>
+                <a:latin typeface="Calibri"/>
+              </a:rPr>
+              <a:t>hpc.troja.mff.cuni.cz, attached via srun --overlap.</a:t>
+            </a:r>
+          </a:p>
+        </p:txBody>
+      </p:sp>
+      <p:sp>
+        <p:nvSpPr>
+          <p:cNvPr id="18" name="Rectangle 17"/>
+          <p:cNvSpPr/>
+          <p:nvPr/>
+        </p:nvSpPr>
+        <p:spPr>
+          <a:xfrm>
+            <a:off x="0" y="6492240"/>
+            <a:ext cx="12191695" cy="365760"/>
+          </a:xfrm>
+          <a:prstGeom prst="rect">
+            <a:avLst/>
+          </a:prstGeom>
+          <a:solidFill>
+            <a:srgbClr val="0B1F3A"/>
+          </a:solidFill>
+          <a:ln>
+            <a:noFill/>
+          </a:ln>
+          <a:effectLst/>
+        </p:spPr>
+        <p:style>
+          <a:lnRef idx="1">
+            <a:schemeClr val="accent1"/>
+          </a:lnRef>
+          <a:fillRef idx="3">
+            <a:schemeClr val="accent1"/>
+          </a:fillRef>
+          <a:effectRef idx="2">
+            <a:schemeClr val="accent1"/>
+          </a:effectRef>
+          <a:fontRef idx="minor">
+            <a:schemeClr val="lt1"/>
+          </a:fontRef>
+        </p:style>
+        <p:txBody>
+          <a:bodyPr rtlCol="0" anchor="ctr"/>
+          <a:lstStyle/>
+          <a:p>
+            <a:pPr algn="ctr"/>
+            <a:endParaRPr/>
+          </a:p>
+        </p:txBody>
+      </p:sp>
+      <p:sp>
+        <p:nvSpPr>
+          <p:cNvPr id="19" name="Rectangle 18"/>
+          <p:cNvSpPr/>
+          <p:nvPr/>
+        </p:nvSpPr>
+        <p:spPr>
+          <a:xfrm>
+            <a:off x="457200" y="6492240"/>
+            <a:ext cx="7315200" cy="365760"/>
+          </a:xfrm>
+          <a:prstGeom prst="rect">
+            <a:avLst/>
+          </a:prstGeom>
+          <a:noFill/>
+          <a:ln>
+            <a:noFill/>
+          </a:ln>
+          <a:effectLst/>
+        </p:spPr>
+        <p:style>
+          <a:lnRef idx="1">
+            <a:schemeClr val="accent1"/>
+          </a:lnRef>
+          <a:fillRef idx="3">
+            <a:schemeClr val="accent1"/>
+          </a:fillRef>
+          <a:effectRef idx="2">
+            <a:schemeClr val="accent1"/>
+          </a:effectRef>
+          <a:fontRef idx="minor">
+            <a:schemeClr val="lt1"/>
+          </a:fontRef>
+        </p:style>
+        <p:txBody>
+          <a:bodyPr wrap="square" lIns="109728" tIns="36576" rIns="109728" bIns="36576" rtlCol="0" anchor="ctr"/>
+          <a:lstStyle/>
+          <a:p>
+            <a:pPr algn="l"/>
+            <a:r>
+              <a:rPr sz="1000" b="0">
+                <a:solidFill>
+                  <a:srgbClr val="E8EEF4"/>
+                </a:solidFill>
+                <a:latin typeface="Calibri"/>
+              </a:rPr>
+              <a:t>MCP Servers for Biomedical Research</a:t>
+            </a:r>
+          </a:p>
+        </p:txBody>
+      </p:sp>
+      <p:sp>
+        <p:nvSpPr>
+          <p:cNvPr id="20" name="Rectangle 19"/>
+          <p:cNvSpPr/>
+          <p:nvPr/>
+        </p:nvSpPr>
+        <p:spPr>
+          <a:xfrm>
+            <a:off x="10515600" y="6492240"/>
+            <a:ext cx="1216152" cy="365760"/>
+          </a:xfrm>
+          <a:prstGeom prst="rect">
+            <a:avLst/>
+          </a:prstGeom>
+          <a:noFill/>
+          <a:ln>
+            <a:noFill/>
+          </a:ln>
+          <a:effectLst/>
+        </p:spPr>
+        <p:style>
+          <a:lnRef idx="1">
+            <a:schemeClr val="accent1"/>
+          </a:lnRef>
+          <a:fillRef idx="3">
+            <a:schemeClr val="accent1"/>
+          </a:fillRef>
+          <a:effectRef idx="2">
+            <a:schemeClr val="accent1"/>
+          </a:effectRef>
+          <a:fontRef idx="minor">
+            <a:schemeClr val="lt1"/>
+          </a:fontRef>
+        </p:style>
+        <p:txBody>
+          <a:bodyPr wrap="square" lIns="109728" tIns="36576" rIns="109728" bIns="36576" rtlCol="0" anchor="ctr"/>
+          <a:lstStyle/>
+          <a:p>
+            <a:pPr algn="r"/>
+            <a:r>
+              <a:rPr sz="1000" b="1">
+                <a:solidFill>
+                  <a:srgbClr val="F2A65A"/>
+                </a:solidFill>
+                <a:latin typeface="Calibri"/>
+              </a:rPr>
+              <a:t>5 / 6</a:t>
+            </a:r>
+          </a:p>
+        </p:txBody>
+      </p:sp>
+    </p:spTree>
+  </p:cSld>
+  <p:clrMapOvr>
+    <a:masterClrMapping/>
+  </p:clrMapOvr>
+</p:sld>
+</file>
+
+<file path=ppt/slides/slide8.xml><?xml version="1.0" encoding="utf-8"?>
 <p:sld xmlns:a="http://schemas.openxmlformats.org/drawingml/2006/main" xmlns:r="http://schemas.openxmlformats.org/officeDocument/2006/relationships" xmlns:p="http://schemas.openxmlformats.org/presentationml/2006/main">
   <p:cSld>
     <p:bg>
@@ -5109,7 +6617,7 @@
                 </a:solidFill>
                 <a:latin typeface="Calibri"/>
               </a:rPr>
-              <a:t>6 / 7</a:t>
+              <a:t>6 / 6</a:t>
             </a:r>
           </a:p>
         </p:txBody>
@@ -5157,7 +6665,7 @@
 </p:sld>
 </file>
 
-<file path=ppt/slides/slide8.xml><?xml version="1.0" encoding="utf-8"?>
+<file path=ppt/slides/slide9.xml><?xml version="1.0" encoding="utf-8"?>
 <p:sld xmlns:a="http://schemas.openxmlformats.org/drawingml/2006/main" xmlns:r="http://schemas.openxmlformats.org/officeDocument/2006/relationships" xmlns:p="http://schemas.openxmlformats.org/presentationml/2006/main">
   <p:cSld name="Slide 8">
     <p:bg>
